--- a/deliverables/HourlyPowerData_snapshot.pptx
+++ b/deliverables/HourlyPowerData_snapshot.pptx
@@ -19384,7 +19384,7 @@
               <a:rPr sz="1200" b="0">
                 <a:latin typeface="Arial"/>
               </a:rPr>
-              <a:t>Data as of 16 July 2026</a:t>
+              <a:t>Data as of 30 July 2026</a:t>
             </a:r>
           </a:p>
         </p:txBody>

--- a/deliverables/HourlyPowerData_snapshot.pptx
+++ b/deliverables/HourlyPowerData_snapshot.pptx
@@ -19384,7 +19384,7 @@
               <a:rPr sz="1200" b="0">
                 <a:latin typeface="Arial"/>
               </a:rPr>
-              <a:t>Data as of 30 July 2026</a:t>
+              <a:t>Data as of 31 July 2026</a:t>
             </a:r>
           </a:p>
         </p:txBody>

--- a/deliverables/HourlyPowerData_snapshot.pptx
+++ b/deliverables/HourlyPowerData_snapshot.pptx
@@ -19384,7 +19384,7 @@
               <a:rPr sz="1200" b="0">
                 <a:latin typeface="Arial"/>
               </a:rPr>
-              <a:t>Data as of 31 July 2026</a:t>
+              <a:t>Data as of 2 August 2026</a:t>
             </a:r>
           </a:p>
         </p:txBody>

--- a/deliverables/HourlyPowerData_snapshot.pptx
+++ b/deliverables/HourlyPowerData_snapshot.pptx
@@ -19384,7 +19384,7 @@
               <a:rPr sz="1200" b="0">
                 <a:latin typeface="Arial"/>
               </a:rPr>
-              <a:t>Data as of 2 August 2026</a:t>
+              <a:t>Data as of 10 August 2026</a:t>
             </a:r>
           </a:p>
         </p:txBody>

--- a/deliverables/HourlyPowerData_snapshot.pptx
+++ b/deliverables/HourlyPowerData_snapshot.pptx
@@ -19384,7 +19384,7 @@
               <a:rPr sz="1200" b="0">
                 <a:latin typeface="Arial"/>
               </a:rPr>
-              <a:t>Data as of 10 August 2026</a:t>
+              <a:t>Data as of 23 August 2026</a:t>
             </a:r>
           </a:p>
         </p:txBody>

--- a/deliverables/HourlyPowerData_snapshot.pptx
+++ b/deliverables/HourlyPowerData_snapshot.pptx
@@ -19384,7 +19384,7 @@
               <a:rPr sz="1200" b="0">
                 <a:latin typeface="Arial"/>
               </a:rPr>
-              <a:t>Data as of 23 August 2026</a:t>
+              <a:t>Data as of 25 August 2026</a:t>
             </a:r>
           </a:p>
         </p:txBody>
@@ -19828,7 +19828,7 @@
                 </a:solidFill>
                 <a:latin typeface="Arial"/>
               </a:rPr>
-              <a:t>Monthly baseload power price by market (€/MWh)</a:t>
+              <a:t>Monthly baseload power price by market (€/MWh). GB is the Elexon market index, not a day-ahead auction</a:t>
             </a:r>
           </a:p>
         </p:txBody>

--- a/deliverables/HourlyPowerData_snapshot.pptx
+++ b/deliverables/HourlyPowerData_snapshot.pptx
@@ -19384,7 +19384,7 @@
               <a:rPr sz="1200" b="0">
                 <a:latin typeface="Arial"/>
               </a:rPr>
-              <a:t>Data as of 25 August 2026</a:t>
+              <a:t>Data as of 26 August 2026</a:t>
             </a:r>
           </a:p>
         </p:txBody>

--- a/deliverables/HourlyPowerData_snapshot.pptx
+++ b/deliverables/HourlyPowerData_snapshot.pptx
@@ -19384,7 +19384,7 @@
               <a:rPr sz="1200" b="0">
                 <a:latin typeface="Arial"/>
               </a:rPr>
-              <a:t>Data as of 6 September 2026</a:t>
+              <a:t>Data as of 10 September 2026</a:t>
             </a:r>
           </a:p>
         </p:txBody>
